--- a/examples/treinamento.pptx
+++ b/examples/treinamento.pptx
@@ -3158,8 +3158,8 @@
         </p:nvSpPr>
         <p:spPr>
           <a:xfrm>
-            <a:off x="731520" y="2194560"/>
-            <a:ext cx="10698480" cy="1463040"/>
+            <a:off x="731520" y="1920240"/>
+            <a:ext cx="10698480" cy="1737360"/>
           </a:xfrm>
           <a:prstGeom prst="rect">
             <a:avLst/>
